--- a/deliverables/答辩准备/答辩PPT-示范.pptx
+++ b/deliverables/答辩准备/答辩PPT-示范.pptx
@@ -685,7 +685,7 @@
             <a:r>
               <a:rPr lang="en-US" dirty="0"/>
               <a:t>【放在已知风险之后，作为新第 16 页】橙色【】里的内容必须由队长换成真实例子，没有就删掉这一行，不要编。
-已知有记录的例子：10-31 队长对照赛题指出三处没做全（冲刺方案第 11 节开头）；队长确认分工调整、视频由队长本人录制剪辑、PPT 由队员手改（status-B）。单元测试 370 项是会话 C 在 11-01 实跑的数字（只有需要 Docker 的一组报错，属预期）。
+已知有记录的例子：10-31 队长对照赛题指出三处没做全（冲刺方案第 11 节开头）；队长确认分工调整、视频由队长本人录制剪辑、PPT 由队员手改（status-B）。单元测试 370 项是会话 C 在 11-01 实跑的数字：2 项跳过，需要 Docker 的一组在云端起不来（报 1 个错误），其余通过；不要说成“370 项全部通过”。原始输出见 答辩准备/素材/单元测试输出-20261101.txt。
 【这一页必须说出口的一句话】代码大部分是 AI 写的，但做什么、不做什么、哪条规则不能让步、结果算不算数，是我们定的。</a:t>
             </a:r>
             <a:endParaRPr lang="en-US" dirty="0"/>
@@ -3510,7 +3510,7 @@
                   <a:srgbClr val="0F172A"/>
                 </a:solidFill>
               </a:rPr>
-              <a:t>① 引擎：后端、安全内核、单元测试（370 项）</a:t>
+              <a:t>① 引擎：后端、安全内核、单元测试（370 项，除需 Docker 的一组外通过）</a:t>
             </a:r>
             <a:endParaRPr lang="en-US" sz="1300" dirty="0"/>
           </a:p>
